--- a/Reporte 270326.pptx
+++ b/Reporte 270326.pptx
@@ -6058,12 +6058,20 @@
               <a:t>Elaborado: </a:t>
             </a:r>
             <a:r>
+              <a:rPr lang="es-MX" sz="1600">
+                <a:solidFill>
+                  <a:srgbClr val="D8AB72"/>
+                </a:solidFill>
+              </a:rPr>
+              <a:t>27 </a:t>
+            </a:r>
+            <a:r>
               <a:rPr lang="es-MX" sz="1600" dirty="0">
                 <a:solidFill>
                   <a:srgbClr val="D8AB72"/>
                 </a:solidFill>
               </a:rPr>
-              <a:t>26 de marzo</a:t>
+              <a:t>de marzo</a:t>
             </a:r>
           </a:p>
           <a:p>
@@ -6181,10 +6189,10 @@
       </p:sp>
       <p:pic>
         <p:nvPicPr>
-          <p:cNvPr id="3" name="Imagen 2">
+          <p:cNvPr id="4" name="Imagen 3">
             <a:extLst>
               <a:ext uri="{FF2B5EF4-FFF2-40B4-BE49-F238E27FC236}">
-                <a16:creationId xmlns:a16="http://schemas.microsoft.com/office/drawing/2014/main" id="{2CC9F395-F244-8238-760C-15E16E4460FF}"/>
+                <a16:creationId xmlns:a16="http://schemas.microsoft.com/office/drawing/2014/main" id="{1E7BDE20-E6EC-4D42-171E-86C4AC8198BA}"/>
               </a:ext>
             </a:extLst>
           </p:cNvPr>
@@ -6201,8 +6209,8 @@
         </p:blipFill>
         <p:spPr>
           <a:xfrm>
-            <a:off x="0" y="348690"/>
-            <a:ext cx="9144000" cy="4446119"/>
+            <a:off x="0" y="709178"/>
+            <a:ext cx="9144000" cy="3725144"/>
           </a:xfrm>
           <a:prstGeom prst="rect">
             <a:avLst/>
@@ -6279,10 +6287,10 @@
       </p:sp>
       <p:pic>
         <p:nvPicPr>
-          <p:cNvPr id="4" name="Imagen 3">
+          <p:cNvPr id="5" name="Imagen 4">
             <a:extLst>
               <a:ext uri="{FF2B5EF4-FFF2-40B4-BE49-F238E27FC236}">
-                <a16:creationId xmlns:a16="http://schemas.microsoft.com/office/drawing/2014/main" id="{B5838EF7-1B0E-ABAD-8475-62BDC8CDAE1B}"/>
+                <a16:creationId xmlns:a16="http://schemas.microsoft.com/office/drawing/2014/main" id="{3B1AFB52-C97B-C717-D1B9-3225BE99207C}"/>
               </a:ext>
             </a:extLst>
           </p:cNvPr>
@@ -6299,8 +6307,8 @@
         </p:blipFill>
         <p:spPr>
           <a:xfrm>
-            <a:off x="0" y="819957"/>
-            <a:ext cx="9144000" cy="3503585"/>
+            <a:off x="0" y="816815"/>
+            <a:ext cx="9144000" cy="3509870"/>
           </a:xfrm>
           <a:prstGeom prst="rect">
             <a:avLst/>
@@ -6377,10 +6385,10 @@
       </p:sp>
       <p:pic>
         <p:nvPicPr>
-          <p:cNvPr id="3" name="Imagen 2">
+          <p:cNvPr id="4" name="Imagen 3">
             <a:extLst>
               <a:ext uri="{FF2B5EF4-FFF2-40B4-BE49-F238E27FC236}">
-                <a16:creationId xmlns:a16="http://schemas.microsoft.com/office/drawing/2014/main" id="{30E517A5-4696-303C-C51C-A2D392E92CE2}"/>
+                <a16:creationId xmlns:a16="http://schemas.microsoft.com/office/drawing/2014/main" id="{7D045332-E273-D841-CDB3-FE2DDA6554EF}"/>
               </a:ext>
             </a:extLst>
           </p:cNvPr>
@@ -6397,8 +6405,8 @@
         </p:blipFill>
         <p:spPr>
           <a:xfrm>
-            <a:off x="0" y="1208795"/>
-            <a:ext cx="9144000" cy="2725909"/>
+            <a:off x="0" y="1268743"/>
+            <a:ext cx="9144000" cy="2606014"/>
           </a:xfrm>
           <a:prstGeom prst="rect">
             <a:avLst/>
@@ -6475,10 +6483,10 @@
       </p:sp>
       <p:pic>
         <p:nvPicPr>
-          <p:cNvPr id="4" name="Imagen 3">
+          <p:cNvPr id="3" name="Imagen 2">
             <a:extLst>
               <a:ext uri="{FF2B5EF4-FFF2-40B4-BE49-F238E27FC236}">
-                <a16:creationId xmlns:a16="http://schemas.microsoft.com/office/drawing/2014/main" id="{50DDF3C4-FC06-458F-362B-6D907FEBFC16}"/>
+                <a16:creationId xmlns:a16="http://schemas.microsoft.com/office/drawing/2014/main" id="{E19EB998-DDDB-A47F-8C29-EB5FDB884A26}"/>
               </a:ext>
             </a:extLst>
           </p:cNvPr>
@@ -6495,8 +6503,8 @@
         </p:blipFill>
         <p:spPr>
           <a:xfrm>
-            <a:off x="0" y="1266915"/>
-            <a:ext cx="9144000" cy="2609670"/>
+            <a:off x="0" y="1370479"/>
+            <a:ext cx="9144000" cy="2402541"/>
           </a:xfrm>
           <a:prstGeom prst="rect">
             <a:avLst/>
@@ -6579,32 +6587,49 @@
       </p:sp>
       <p:pic>
         <p:nvPicPr>
-          <p:cNvPr id="4" name="Imagen 3">
+          <p:cNvPr id="1026" name="Picture 2">
             <a:extLst>
               <a:ext uri="{FF2B5EF4-FFF2-40B4-BE49-F238E27FC236}">
-                <a16:creationId xmlns:a16="http://schemas.microsoft.com/office/drawing/2014/main" id="{CD19D719-AEDC-73CD-0E99-38014157F077}"/>
+                <a16:creationId xmlns:a16="http://schemas.microsoft.com/office/drawing/2014/main" id="{371B03E7-7470-3936-2EE9-306F04FE572F}"/>
               </a:ext>
             </a:extLst>
           </p:cNvPr>
           <p:cNvPicPr>
-            <a:picLocks noChangeAspect="1"/>
+            <a:picLocks noChangeAspect="1" noChangeArrowheads="1"/>
           </p:cNvPicPr>
           <p:nvPr/>
         </p:nvPicPr>
         <p:blipFill>
-          <a:blip r:embed="rId2"/>
+          <a:blip r:embed="rId2">
+            <a:extLst>
+              <a:ext uri="{28A0092B-C50C-407E-A947-70E740481C1C}">
+                <a14:useLocalDpi xmlns:a14="http://schemas.microsoft.com/office/drawing/2010/main" val="0"/>
+              </a:ext>
+            </a:extLst>
+          </a:blip>
+          <a:srcRect/>
           <a:stretch>
             <a:fillRect/>
           </a:stretch>
         </p:blipFill>
-        <p:spPr>
+        <p:spPr bwMode="auto">
           <a:xfrm>
-            <a:off x="0" y="767112"/>
-            <a:ext cx="9144000" cy="3609275"/>
+            <a:off x="2038350" y="666750"/>
+            <a:ext cx="5067300" cy="3810000"/>
           </a:xfrm>
           <a:prstGeom prst="rect">
             <a:avLst/>
           </a:prstGeom>
+          <a:noFill/>
+          <a:extLst>
+            <a:ext uri="{909E8E84-426E-40DD-AFC4-6F175D3DCCD1}">
+              <a14:hiddenFill xmlns:a14="http://schemas.microsoft.com/office/drawing/2010/main">
+                <a:solidFill>
+                  <a:srgbClr val="FFFFFF"/>
+                </a:solidFill>
+              </a14:hiddenFill>
+            </a:ext>
+          </a:extLst>
         </p:spPr>
       </p:pic>
     </p:spTree>
@@ -6637,6 +6662,36 @@
           <a:chExt cx="0" cy="0"/>
         </a:xfrm>
       </p:grpSpPr>
+      <p:pic>
+        <p:nvPicPr>
+          <p:cNvPr id="4" name="Imagen 3">
+            <a:extLst>
+              <a:ext uri="{FF2B5EF4-FFF2-40B4-BE49-F238E27FC236}">
+                <a16:creationId xmlns:a16="http://schemas.microsoft.com/office/drawing/2014/main" id="{DC817B70-9C92-9F9F-A5C0-FBB60AD6AD1C}"/>
+              </a:ext>
+            </a:extLst>
+          </p:cNvPr>
+          <p:cNvPicPr>
+            <a:picLocks noChangeAspect="1"/>
+          </p:cNvPicPr>
+          <p:nvPr/>
+        </p:nvPicPr>
+        <p:blipFill>
+          <a:blip r:embed="rId2"/>
+          <a:stretch>
+            <a:fillRect/>
+          </a:stretch>
+        </p:blipFill>
+        <p:spPr>
+          <a:xfrm>
+            <a:off x="591587" y="314000"/>
+            <a:ext cx="7887801" cy="4658375"/>
+          </a:xfrm>
+          <a:prstGeom prst="rect">
+            <a:avLst/>
+          </a:prstGeom>
+        </p:spPr>
+      </p:pic>
       <p:sp>
         <p:nvSpPr>
           <p:cNvPr id="5" name="CuadroTexto 4">
@@ -6680,36 +6735,6 @@
           </a:p>
         </p:txBody>
       </p:sp>
-      <p:pic>
-        <p:nvPicPr>
-          <p:cNvPr id="3" name="Imagen 2">
-            <a:extLst>
-              <a:ext uri="{FF2B5EF4-FFF2-40B4-BE49-F238E27FC236}">
-                <a16:creationId xmlns:a16="http://schemas.microsoft.com/office/drawing/2014/main" id="{B501B103-F22C-DD5F-E8AE-E6B768ABA73A}"/>
-              </a:ext>
-            </a:extLst>
-          </p:cNvPr>
-          <p:cNvPicPr>
-            <a:picLocks noChangeAspect="1"/>
-          </p:cNvPicPr>
-          <p:nvPr/>
-        </p:nvPicPr>
-        <p:blipFill>
-          <a:blip r:embed="rId2"/>
-          <a:stretch>
-            <a:fillRect/>
-          </a:stretch>
-        </p:blipFill>
-        <p:spPr>
-          <a:xfrm>
-            <a:off x="2409523" y="1095169"/>
-            <a:ext cx="4324954" cy="2953162"/>
-          </a:xfrm>
-          <a:prstGeom prst="rect">
-            <a:avLst/>
-          </a:prstGeom>
-        </p:spPr>
-      </p:pic>
     </p:spTree>
     <p:extLst>
       <p:ext uri="{BB962C8B-B14F-4D97-AF65-F5344CB8AC3E}">
@@ -7561,10 +7586,10 @@
       </p:sp>
       <p:pic>
         <p:nvPicPr>
-          <p:cNvPr id="4" name="Imagen 3">
+          <p:cNvPr id="5" name="Imagen 4">
             <a:extLst>
               <a:ext uri="{FF2B5EF4-FFF2-40B4-BE49-F238E27FC236}">
-                <a16:creationId xmlns:a16="http://schemas.microsoft.com/office/drawing/2014/main" id="{2E22F3C9-B0DA-A53F-9EAF-5611983066E0}"/>
+                <a16:creationId xmlns:a16="http://schemas.microsoft.com/office/drawing/2014/main" id="{B260151C-C063-2525-50D2-C466A04AF7B7}"/>
               </a:ext>
             </a:extLst>
           </p:cNvPr>
@@ -7581,8 +7606,8 @@
         </p:blipFill>
         <p:spPr>
           <a:xfrm>
-            <a:off x="0" y="358422"/>
-            <a:ext cx="9144000" cy="4426655"/>
+            <a:off x="0" y="345673"/>
+            <a:ext cx="9144000" cy="4452154"/>
           </a:xfrm>
           <a:prstGeom prst="rect">
             <a:avLst/>
@@ -7659,10 +7684,10 @@
       </p:sp>
       <p:pic>
         <p:nvPicPr>
-          <p:cNvPr id="3" name="Imagen 2">
+          <p:cNvPr id="4" name="Imagen 3">
             <a:extLst>
               <a:ext uri="{FF2B5EF4-FFF2-40B4-BE49-F238E27FC236}">
-                <a16:creationId xmlns:a16="http://schemas.microsoft.com/office/drawing/2014/main" id="{36D9DF85-FC41-DBF8-6281-C26A40DDBD20}"/>
+                <a16:creationId xmlns:a16="http://schemas.microsoft.com/office/drawing/2014/main" id="{5F4ACEE6-3995-0F17-38B7-37E5F98932BD}"/>
               </a:ext>
             </a:extLst>
           </p:cNvPr>
@@ -7679,8 +7704,8 @@
         </p:blipFill>
         <p:spPr>
           <a:xfrm>
-            <a:off x="0" y="948377"/>
-            <a:ext cx="9144000" cy="3246746"/>
+            <a:off x="0" y="921172"/>
+            <a:ext cx="9144000" cy="3301156"/>
           </a:xfrm>
           <a:prstGeom prst="rect">
             <a:avLst/>
